--- a/docs/medmission-briefing.pptx
+++ b/docs/medmission-briefing.pptx
@@ -7762,7 +7762,7 @@
                 </a:solidFill>
                 <a:latin typeface="맑은 고딕"/>
               </a:rPr>
-              <a:t>표에 없는 조회 키는 거부하지 않고 무시. 이름·접수번호는 와일드카드와 대소문자 무시 — 문진지 번호를 손으로 치는 동선이라 관대하게 처리. Windows가 11112를 예약한 랩톱은 12112 등으로 바뀌므로 포트는 현장 확인 필요.</a:t>
+              <a:t>표에 없는 조회 키는 거부하지 않고 무시. 이름·접수번호는 와일드카드와 대소문자 무시 — 접수번호를 손으로 치는 동선이라 관대하게 처리. Windows가 11112를 예약한 랩톱은 12112 등으로 바뀌므로 포트는 현장 확인 필요.</a:t>
             </a:r>
           </a:p>
         </p:txBody>
